--- a/Smart_Backlog_Assistant_Case_Study.pptx
+++ b/Smart_Backlog_Assistant_Case_Study.pptx
@@ -1064,7 +1064,7 @@
           <a:p>
             <a:r>
               <a:rPr lang="en-US"/>
-              <a:t>This defense was strengthened after a plausible response rewrote a requirement and referenced an unknown backlog ID. Source comparison exposed the issue. Grounding checks, known-ID validation, typed categories, and negative tests now prevent that class of result from being accepted.</a:t>
+              <a:t>This defense was strengthened after a convincing-looking but incorrect response rewrote a requirement and referenced an unknown backlog ID. Source comparison exposed the issue. Grounding checks, known-ID validation, typed categories, and negative tests now prevent that class of result from being accepted.</a:t>
             </a:r>
           </a:p>
           <a:p>
@@ -11136,14 +11136,20 @@
           <a:p>
             <a:pPr algn="l"/>
             <a:r>
-              <a:rPr sz="1300" b="0">
+              <a:rPr lang="en-US" sz="1300" b="0">
                 <a:solidFill>
                   <a:srgbClr val="182230"/>
                 </a:solidFill>
                 <a:latin typeface="Aptos"/>
               </a:rPr>
-              <a:t>A plausible model response rewrote a requirement and referenced an unknown backlog ID. Source comparison exposed it; grounding, known-ID validation, typed allowlists, and negative tests now prevent recurrence.</a:t>
-            </a:r>
+              <a:t>A convincing-looking but incorrect model response rewrote a requirement and referenced an unknown backlog ID. Source comparison exposed it; grounding, known-ID validation, typed allowlists, and negative tests now prevent recurrence.</a:t>
+            </a:r>
+            <a:endParaRPr sz="1300" b="0">
+              <a:solidFill>
+                <a:srgbClr val="182230"/>
+              </a:solidFill>
+              <a:latin typeface="Aptos"/>
+            </a:endParaRPr>
           </a:p>
         </p:txBody>
       </p:sp>

--- a/Smart_Backlog_Assistant_Case_Study.pptx
+++ b/Smart_Backlog_Assistant_Case_Study.pptx
@@ -5,7 +5,7 @@
     <p:sldMasterId id="2147483648" r:id="rId1"/>
   </p:sldMasterIdLst>
   <p:notesMasterIdLst>
-    <p:notesMasterId r:id="rId9"/>
+    <p:notesMasterId r:id="rId10"/>
   </p:notesMasterIdLst>
   <p:sldIdLst>
     <p:sldId id="256" r:id="rId2"/>
@@ -14,7 +14,8 @@
     <p:sldId id="259" r:id="rId5"/>
     <p:sldId id="260" r:id="rId6"/>
     <p:sldId id="261" r:id="rId7"/>
-    <p:sldId id="262" r:id="rId8"/>
+    <p:sldId id="264" r:id="rId8"/>
+    <p:sldId id="262" r:id="rId9"/>
   </p:sldIdLst>
   <p:sldSz cx="12192000" cy="6858000"/>
   <p:notesSz cx="6858000" cy="9144000"/>
@@ -214,7 +215,7 @@
           <a:p>
             <a:fld id="{212EAFC6-FE04-4912-AABB-D7055929C8E5}" type="datetimeFigureOut">
               <a:rPr lang="en-US" smtClean="0"/>
-              <a:t>8/19/2026</a:t>
+              <a:t>8/21/2026</a:t>
             </a:fld>
             <a:endParaRPr lang="en-US"/>
           </a:p>
@@ -1359,7 +1360,7 @@
           <a:p>
             <a:fld id="{0F5DEDF5-4B6A-4336-A58F-DE4D6F5BCC65}" type="slidenum">
               <a:rPr lang="en-US" smtClean="0"/>
-              <a:t>7</a:t>
+              <a:t>8</a:t>
             </a:fld>
             <a:endParaRPr lang="en-US"/>
           </a:p>
@@ -1557,7 +1558,7 @@
           <a:p>
             <a:fld id="{5BCAD085-E8A6-8845-BD4E-CB4CCA059FC4}" type="datetimeFigureOut">
               <a:rPr lang="en-US" smtClean="0"/>
-              <a:t>8/19/2026</a:t>
+              <a:t>8/21/2026</a:t>
             </a:fld>
             <a:endParaRPr lang="en-US"/>
           </a:p>
@@ -1725,7 +1726,7 @@
           <a:p>
             <a:fld id="{5BCAD085-E8A6-8845-BD4E-CB4CCA059FC4}" type="datetimeFigureOut">
               <a:rPr lang="en-US" smtClean="0"/>
-              <a:t>8/19/2026</a:t>
+              <a:t>8/21/2026</a:t>
             </a:fld>
             <a:endParaRPr lang="en-US"/>
           </a:p>
@@ -1903,7 +1904,7 @@
           <a:p>
             <a:fld id="{5BCAD085-E8A6-8845-BD4E-CB4CCA059FC4}" type="datetimeFigureOut">
               <a:rPr lang="en-US" smtClean="0"/>
-              <a:t>8/19/2026</a:t>
+              <a:t>8/21/2026</a:t>
             </a:fld>
             <a:endParaRPr lang="en-US"/>
           </a:p>
@@ -2071,7 +2072,7 @@
           <a:p>
             <a:fld id="{5BCAD085-E8A6-8845-BD4E-CB4CCA059FC4}" type="datetimeFigureOut">
               <a:rPr lang="en-US" smtClean="0"/>
-              <a:t>8/19/2026</a:t>
+              <a:t>8/21/2026</a:t>
             </a:fld>
             <a:endParaRPr lang="en-US"/>
           </a:p>
@@ -2316,7 +2317,7 @@
           <a:p>
             <a:fld id="{5BCAD085-E8A6-8845-BD4E-CB4CCA059FC4}" type="datetimeFigureOut">
               <a:rPr lang="en-US" smtClean="0"/>
-              <a:t>8/19/2026</a:t>
+              <a:t>8/21/2026</a:t>
             </a:fld>
             <a:endParaRPr lang="en-US"/>
           </a:p>
@@ -2601,7 +2602,7 @@
           <a:p>
             <a:fld id="{5BCAD085-E8A6-8845-BD4E-CB4CCA059FC4}" type="datetimeFigureOut">
               <a:rPr lang="en-US" smtClean="0"/>
-              <a:t>8/19/2026</a:t>
+              <a:t>8/21/2026</a:t>
             </a:fld>
             <a:endParaRPr lang="en-US"/>
           </a:p>
@@ -3020,7 +3021,7 @@
           <a:p>
             <a:fld id="{5BCAD085-E8A6-8845-BD4E-CB4CCA059FC4}" type="datetimeFigureOut">
               <a:rPr lang="en-US" smtClean="0"/>
-              <a:t>8/19/2026</a:t>
+              <a:t>8/21/2026</a:t>
             </a:fld>
             <a:endParaRPr lang="en-US"/>
           </a:p>
@@ -3137,7 +3138,7 @@
           <a:p>
             <a:fld id="{5BCAD085-E8A6-8845-BD4E-CB4CCA059FC4}" type="datetimeFigureOut">
               <a:rPr lang="en-US" smtClean="0"/>
-              <a:t>8/19/2026</a:t>
+              <a:t>8/21/2026</a:t>
             </a:fld>
             <a:endParaRPr lang="en-US"/>
           </a:p>
@@ -3232,7 +3233,7 @@
           <a:p>
             <a:fld id="{5BCAD085-E8A6-8845-BD4E-CB4CCA059FC4}" type="datetimeFigureOut">
               <a:rPr lang="en-US" smtClean="0"/>
-              <a:t>8/19/2026</a:t>
+              <a:t>8/21/2026</a:t>
             </a:fld>
             <a:endParaRPr lang="en-US"/>
           </a:p>
@@ -3507,7 +3508,7 @@
           <a:p>
             <a:fld id="{5BCAD085-E8A6-8845-BD4E-CB4CCA059FC4}" type="datetimeFigureOut">
               <a:rPr lang="en-US" smtClean="0"/>
-              <a:t>8/19/2026</a:t>
+              <a:t>8/21/2026</a:t>
             </a:fld>
             <a:endParaRPr lang="en-US"/>
           </a:p>
@@ -3759,7 +3760,7 @@
           <a:p>
             <a:fld id="{5BCAD085-E8A6-8845-BD4E-CB4CCA059FC4}" type="datetimeFigureOut">
               <a:rPr lang="en-US" smtClean="0"/>
-              <a:t>8/19/2026</a:t>
+              <a:t>8/21/2026</a:t>
             </a:fld>
             <a:endParaRPr lang="en-US"/>
           </a:p>
@@ -3970,7 +3971,7 @@
           <a:p>
             <a:fld id="{5BCAD085-E8A6-8845-BD4E-CB4CCA059FC4}" type="datetimeFigureOut">
               <a:rPr lang="en-US" smtClean="0"/>
-              <a:t>8/19/2026</a:t>
+              <a:t>8/21/2026</a:t>
             </a:fld>
             <a:endParaRPr lang="en-US"/>
           </a:p>
@@ -5753,7 +5754,7 @@
         <p:spPr>
           <a:xfrm>
             <a:off x="5513832" y="4023359"/>
-            <a:ext cx="2468880" cy="256032"/>
+            <a:ext cx="2468880" cy="283465"/>
           </a:xfrm>
           <a:prstGeom prst="rect">
             <a:avLst/>
@@ -5762,7 +5763,7 @@
         </p:spPr>
         <p:txBody>
           <a:bodyPr wrap="square" lIns="0" tIns="0" rIns="0" bIns="0" anchor="ctr">
-            <a:spAutoFit/>
+            <a:normAutofit fontScale="92500"/>
           </a:bodyPr>
           <a:lstStyle/>
           <a:p>
@@ -6024,7 +6025,7 @@
           <a:p>
             <a:pPr algn="l"/>
             <a:r>
-              <a:rPr sz="2600" b="1">
+              <a:rPr sz="2600" b="1" dirty="0">
                 <a:solidFill>
                   <a:srgbClr val="0B1F3A"/>
                 </a:solidFill>
@@ -11037,7 +11038,7 @@
         </p:nvSpPr>
         <p:spPr>
           <a:xfrm>
-            <a:off x="594360" y="4617720"/>
+            <a:off x="594360" y="4991346"/>
             <a:ext cx="10927080" cy="1033271"/>
           </a:xfrm>
           <a:prstGeom prst="roundRect">
@@ -11085,7 +11086,7 @@
         </p:nvSpPr>
         <p:spPr>
           <a:xfrm>
-            <a:off x="841248" y="4791456"/>
+            <a:off x="841248" y="5165082"/>
             <a:ext cx="1920240" cy="274320"/>
           </a:xfrm>
           <a:prstGeom prst="rect">
@@ -11120,7 +11121,7 @@
         </p:nvSpPr>
         <p:spPr>
           <a:xfrm>
-            <a:off x="2743200" y="4727448"/>
+            <a:off x="2743200" y="5101074"/>
             <a:ext cx="8458200" cy="621792"/>
           </a:xfrm>
           <a:prstGeom prst="rect">
@@ -11161,7 +11162,7 @@
         </p:nvSpPr>
         <p:spPr>
           <a:xfrm>
-            <a:off x="3657600" y="5870448"/>
+            <a:off x="3657600" y="6145752"/>
             <a:ext cx="4846320" cy="310896"/>
           </a:xfrm>
           <a:prstGeom prst="roundRect">
@@ -11336,7 +11337,7 @@
           <a:p>
             <a:pPr algn="l"/>
             <a:r>
-              <a:rPr sz="2600" b="1">
+              <a:rPr sz="2600" b="1" dirty="0">
                 <a:solidFill>
                   <a:srgbClr val="0B1F3A"/>
                 </a:solidFill>
@@ -11371,7 +11372,7 @@
           <a:p>
             <a:pPr algn="l"/>
             <a:r>
-              <a:rPr sz="1100" b="0">
+              <a:rPr sz="1100" b="0" dirty="0">
                 <a:solidFill>
                   <a:srgbClr val="5B6675"/>
                 </a:solidFill>
@@ -12654,6 +12655,1627 @@
 </file>
 
 <file path=ppt/slides/slide7.xml><?xml version="1.0" encoding="utf-8"?>
+<p:sld xmlns:a="http://schemas.openxmlformats.org/drawingml/2006/main" xmlns:r="http://schemas.openxmlformats.org/officeDocument/2006/relationships" xmlns:p="http://schemas.openxmlformats.org/presentationml/2006/main">
+  <p:cSld>
+    <p:spTree>
+      <p:nvGrpSpPr>
+        <p:cNvPr id="1" name=""/>
+        <p:cNvGrpSpPr/>
+        <p:nvPr/>
+      </p:nvGrpSpPr>
+      <p:grpSpPr>
+        <a:xfrm>
+          <a:off x="0" y="0"/>
+          <a:ext cx="0" cy="0"/>
+          <a:chOff x="0" y="0"/>
+          <a:chExt cx="0" cy="0"/>
+        </a:xfrm>
+      </p:grpSpPr>
+      <p:sp>
+        <p:nvSpPr>
+          <p:cNvPr id="2" name="TextBox 1"/>
+          <p:cNvSpPr txBox="1"/>
+          <p:nvPr/>
+        </p:nvSpPr>
+        <p:spPr>
+          <a:xfrm>
+            <a:off x="502920" y="256032"/>
+            <a:ext cx="10607040" cy="411480"/>
+          </a:xfrm>
+          <a:prstGeom prst="rect">
+            <a:avLst/>
+          </a:prstGeom>
+          <a:noFill/>
+        </p:spPr>
+        <p:txBody>
+          <a:bodyPr wrap="square" lIns="0" tIns="0" rIns="0" bIns="0" anchor="ctr">
+            <a:spAutoFit/>
+          </a:bodyPr>
+          <a:lstStyle/>
+          <a:p>
+            <a:pPr algn="l"/>
+            <a:r>
+              <a:rPr sz="2600" b="1" dirty="0">
+                <a:solidFill>
+                  <a:srgbClr val="0B1F3A"/>
+                </a:solidFill>
+                <a:latin typeface="Aptos"/>
+              </a:rPr>
+              <a:t>AI Usage Across the SDLC</a:t>
+            </a:r>
+          </a:p>
+        </p:txBody>
+      </p:sp>
+      <p:sp>
+        <p:nvSpPr>
+          <p:cNvPr id="3" name="TextBox 2"/>
+          <p:cNvSpPr txBox="1"/>
+          <p:nvPr/>
+        </p:nvSpPr>
+        <p:spPr>
+          <a:xfrm>
+            <a:off x="530352" y="694944"/>
+            <a:ext cx="10698480" cy="274320"/>
+          </a:xfrm>
+          <a:prstGeom prst="rect">
+            <a:avLst/>
+          </a:prstGeom>
+          <a:noFill/>
+        </p:spPr>
+        <p:txBody>
+          <a:bodyPr wrap="square" lIns="0" tIns="0" rIns="0" bIns="0" anchor="ctr">
+            <a:spAutoFit/>
+          </a:bodyPr>
+          <a:lstStyle/>
+          <a:p>
+            <a:pPr algn="l"/>
+            <a:r>
+              <a:rPr sz="1100" b="0">
+                <a:solidFill>
+                  <a:srgbClr val="5B6675"/>
+                </a:solidFill>
+                <a:latin typeface="Aptos"/>
+              </a:rPr>
+              <a:t>AI accelerated every phase; humans and deterministic checks kept control.</a:t>
+            </a:r>
+          </a:p>
+        </p:txBody>
+      </p:sp>
+      <p:sp>
+        <p:nvSpPr>
+          <p:cNvPr id="9" name="Table Card"/>
+          <p:cNvSpPr/>
+          <p:nvPr/>
+        </p:nvSpPr>
+        <p:spPr>
+          <a:xfrm>
+            <a:off x="457200" y="1005840"/>
+            <a:ext cx="11277600" cy="5188320"/>
+          </a:xfrm>
+          <a:prstGeom prst="rect">
+            <a:avLst/>
+          </a:prstGeom>
+          <a:solidFill>
+            <a:srgbClr val="FFFFFF"/>
+          </a:solidFill>
+          <a:ln>
+            <a:solidFill>
+              <a:srgbClr val="E2E8F0"/>
+            </a:solidFill>
+          </a:ln>
+        </p:spPr>
+        <p:style>
+          <a:lnRef idx="1">
+            <a:schemeClr val="accent1"/>
+          </a:lnRef>
+          <a:fillRef idx="3">
+            <a:schemeClr val="accent1"/>
+          </a:fillRef>
+          <a:effectRef idx="2">
+            <a:schemeClr val="accent1"/>
+          </a:effectRef>
+          <a:fontRef idx="minor">
+            <a:schemeClr val="lt1"/>
+          </a:fontRef>
+        </p:style>
+        <p:txBody>
+          <a:bodyPr wrap="square" rtlCol="0" anchor="ctr"/>
+          <a:lstStyle/>
+          <a:p>
+            <a:endParaRPr/>
+          </a:p>
+        </p:txBody>
+      </p:sp>
+      <p:graphicFrame>
+        <p:nvGraphicFramePr>
+          <p:cNvPr id="6" name="SDLC Table"/>
+          <p:cNvGraphicFramePr>
+            <a:graphicFrameLocks noGrp="1"/>
+          </p:cNvGraphicFramePr>
+          <p:nvPr>
+            <p:extLst>
+              <p:ext uri="{D42A27DB-BD31-4B8C-83A1-F6EECF244321}">
+                <p14:modId xmlns:p14="http://schemas.microsoft.com/office/powerpoint/2010/main" val="855573419"/>
+              </p:ext>
+            </p:extLst>
+          </p:nvPr>
+        </p:nvGraphicFramePr>
+        <p:xfrm>
+          <a:off x="502920" y="1050000"/>
+          <a:ext cx="11186160" cy="5100000"/>
+        </p:xfrm>
+        <a:graphic>
+          <a:graphicData uri="http://schemas.openxmlformats.org/drawingml/2006/table">
+            <a:tbl>
+              <a:tblPr firstRow="1">
+                <a:tableStyleId>{5C22544A-7EE6-4342-B048-85BDC9FD1C3A}</a:tableStyleId>
+              </a:tblPr>
+              <a:tblGrid>
+                <a:gridCol w="2011680">
+                  <a:extLst>
+                    <a:ext uri="{9D8B030D-6E8A-4147-A177-3AD203B41FA5}">
+                      <a16:colId xmlns:a16="http://schemas.microsoft.com/office/drawing/2014/main" val="20000"/>
+                    </a:ext>
+                  </a:extLst>
+                </a:gridCol>
+                <a:gridCol w="4846320">
+                  <a:extLst>
+                    <a:ext uri="{9D8B030D-6E8A-4147-A177-3AD203B41FA5}">
+                      <a16:colId xmlns:a16="http://schemas.microsoft.com/office/drawing/2014/main" val="20001"/>
+                    </a:ext>
+                  </a:extLst>
+                </a:gridCol>
+                <a:gridCol w="4328160">
+                  <a:extLst>
+                    <a:ext uri="{9D8B030D-6E8A-4147-A177-3AD203B41FA5}">
+                      <a16:colId xmlns:a16="http://schemas.microsoft.com/office/drawing/2014/main" val="20002"/>
+                    </a:ext>
+                  </a:extLst>
+                </a:gridCol>
+              </a:tblGrid>
+              <a:tr h="420000">
+                <a:tc>
+                  <a:txBody>
+                    <a:bodyPr/>
+                    <a:lstStyle/>
+                    <a:p>
+                      <a:pPr algn="l"/>
+                      <a:r>
+                        <a:rPr lang="en-US" sz="1100" b="1">
+                          <a:solidFill>
+                            <a:srgbClr val="FFFFFF"/>
+                          </a:solidFill>
+                          <a:latin typeface="Aptos"/>
+                        </a:rPr>
+                        <a:t>SDLC phase</a:t>
+                      </a:r>
+                    </a:p>
+                  </a:txBody>
+                  <a:tcPr marL="109728" marR="109728" marT="54864" marB="54864" anchor="ctr">
+                    <a:lnL w="9525">
+                      <a:solidFill>
+                        <a:srgbClr val="E2E8F0"/>
+                      </a:solidFill>
+                    </a:lnL>
+                    <a:lnR w="9525">
+                      <a:solidFill>
+                        <a:srgbClr val="E2E8F0"/>
+                      </a:solidFill>
+                    </a:lnR>
+                    <a:lnT w="9525">
+                      <a:solidFill>
+                        <a:srgbClr val="E2E8F0"/>
+                      </a:solidFill>
+                    </a:lnT>
+                    <a:lnB w="9525">
+                      <a:solidFill>
+                        <a:srgbClr val="E2E8F0"/>
+                      </a:solidFill>
+                    </a:lnB>
+                    <a:solidFill>
+                      <a:srgbClr val="0B1F3A"/>
+                    </a:solidFill>
+                  </a:tcPr>
+                </a:tc>
+                <a:tc>
+                  <a:txBody>
+                    <a:bodyPr/>
+                    <a:lstStyle/>
+                    <a:p>
+                      <a:pPr algn="l"/>
+                      <a:r>
+                        <a:rPr lang="en-US" sz="1100" b="1">
+                          <a:solidFill>
+                            <a:srgbClr val="FFFFFF"/>
+                          </a:solidFill>
+                          <a:latin typeface="Aptos"/>
+                        </a:rPr>
+                        <a:t>How AI was used</a:t>
+                      </a:r>
+                    </a:p>
+                  </a:txBody>
+                  <a:tcPr marL="109728" marR="109728" marT="54864" marB="54864" anchor="ctr">
+                    <a:lnL w="9525">
+                      <a:solidFill>
+                        <a:srgbClr val="E2E8F0"/>
+                      </a:solidFill>
+                    </a:lnL>
+                    <a:lnR w="9525">
+                      <a:solidFill>
+                        <a:srgbClr val="E2E8F0"/>
+                      </a:solidFill>
+                    </a:lnR>
+                    <a:lnT w="9525">
+                      <a:solidFill>
+                        <a:srgbClr val="E2E8F0"/>
+                      </a:solidFill>
+                    </a:lnT>
+                    <a:lnB w="9525">
+                      <a:solidFill>
+                        <a:srgbClr val="E2E8F0"/>
+                      </a:solidFill>
+                    </a:lnB>
+                    <a:solidFill>
+                      <a:srgbClr val="0B1F3A"/>
+                    </a:solidFill>
+                  </a:tcPr>
+                </a:tc>
+                <a:tc>
+                  <a:txBody>
+                    <a:bodyPr/>
+                    <a:lstStyle/>
+                    <a:p>
+                      <a:pPr algn="l"/>
+                      <a:r>
+                        <a:rPr lang="en-US" sz="1100" b="1">
+                          <a:solidFill>
+                            <a:srgbClr val="FFFFFF"/>
+                          </a:solidFill>
+                          <a:latin typeface="Aptos"/>
+                        </a:rPr>
+                        <a:t>Human/deterministic control</a:t>
+                      </a:r>
+                    </a:p>
+                  </a:txBody>
+                  <a:tcPr marL="109728" marR="109728" marT="54864" marB="54864" anchor="ctr">
+                    <a:lnL w="9525">
+                      <a:solidFill>
+                        <a:srgbClr val="E2E8F0"/>
+                      </a:solidFill>
+                    </a:lnL>
+                    <a:lnR w="9525">
+                      <a:solidFill>
+                        <a:srgbClr val="E2E8F0"/>
+                      </a:solidFill>
+                    </a:lnR>
+                    <a:lnT w="9525">
+                      <a:solidFill>
+                        <a:srgbClr val="E2E8F0"/>
+                      </a:solidFill>
+                    </a:lnT>
+                    <a:lnB w="9525">
+                      <a:solidFill>
+                        <a:srgbClr val="E2E8F0"/>
+                      </a:solidFill>
+                    </a:lnB>
+                    <a:solidFill>
+                      <a:srgbClr val="0B1F3A"/>
+                    </a:solidFill>
+                  </a:tcPr>
+                </a:tc>
+                <a:extLst>
+                  <a:ext uri="{0D108BD9-81ED-4DB2-BD59-A6C34878D82A}">
+                    <a16:rowId xmlns:a16="http://schemas.microsoft.com/office/drawing/2014/main" val="10000"/>
+                  </a:ext>
+                </a:extLst>
+              </a:tr>
+              <a:tr h="520000">
+                <a:tc>
+                  <a:txBody>
+                    <a:bodyPr/>
+                    <a:lstStyle/>
+                    <a:p>
+                      <a:pPr algn="l"/>
+                      <a:r>
+                        <a:rPr lang="en-US" sz="1000" b="1">
+                          <a:solidFill>
+                            <a:srgbClr val="0B1F3A"/>
+                          </a:solidFill>
+                          <a:latin typeface="Aptos"/>
+                        </a:rPr>
+                        <a:t>Problem analysis</a:t>
+                      </a:r>
+                    </a:p>
+                  </a:txBody>
+                  <a:tcPr marL="109728" marR="109728" marT="54864" marB="54864" anchor="ctr">
+                    <a:lnL w="9525">
+                      <a:solidFill>
+                        <a:srgbClr val="E2E8F0"/>
+                      </a:solidFill>
+                    </a:lnL>
+                    <a:lnR w="9525">
+                      <a:solidFill>
+                        <a:srgbClr val="E2E8F0"/>
+                      </a:solidFill>
+                    </a:lnR>
+                    <a:lnT w="9525">
+                      <a:solidFill>
+                        <a:srgbClr val="E2E8F0"/>
+                      </a:solidFill>
+                    </a:lnT>
+                    <a:lnB w="9525">
+                      <a:solidFill>
+                        <a:srgbClr val="E2E8F0"/>
+                      </a:solidFill>
+                    </a:lnB>
+                    <a:solidFill>
+                      <a:srgbClr val="F1F5F9"/>
+                    </a:solidFill>
+                  </a:tcPr>
+                </a:tc>
+                <a:tc>
+                  <a:txBody>
+                    <a:bodyPr/>
+                    <a:lstStyle/>
+                    <a:p>
+                      <a:pPr algn="l"/>
+                      <a:r>
+                        <a:rPr lang="en-US" sz="1000" b="0">
+                          <a:solidFill>
+                            <a:srgbClr val="33404F"/>
+                          </a:solidFill>
+                          <a:latin typeface="Aptos"/>
+                        </a:rPr>
+                        <a:t>Broke the theme into use cases, risks, and expected outcomes</a:t>
+                      </a:r>
+                    </a:p>
+                  </a:txBody>
+                  <a:tcPr marL="109728" marR="109728" marT="54864" marB="54864" anchor="ctr">
+                    <a:lnL w="9525">
+                      <a:solidFill>
+                        <a:srgbClr val="E2E8F0"/>
+                      </a:solidFill>
+                    </a:lnL>
+                    <a:lnR w="9525">
+                      <a:solidFill>
+                        <a:srgbClr val="E2E8F0"/>
+                      </a:solidFill>
+                    </a:lnR>
+                    <a:lnT w="9525">
+                      <a:solidFill>
+                        <a:srgbClr val="E2E8F0"/>
+                      </a:solidFill>
+                    </a:lnT>
+                    <a:lnB w="9525">
+                      <a:solidFill>
+                        <a:srgbClr val="E2E8F0"/>
+                      </a:solidFill>
+                    </a:lnB>
+                    <a:solidFill>
+                      <a:srgbClr val="F1F5F9"/>
+                    </a:solidFill>
+                  </a:tcPr>
+                </a:tc>
+                <a:tc>
+                  <a:txBody>
+                    <a:bodyPr/>
+                    <a:lstStyle/>
+                    <a:p>
+                      <a:pPr algn="l"/>
+                      <a:r>
+                        <a:rPr lang="en-US" sz="1000" b="0">
+                          <a:solidFill>
+                            <a:srgbClr val="33404F"/>
+                          </a:solidFill>
+                          <a:latin typeface="Aptos"/>
+                        </a:rPr>
+                        <a:t>Scope and priorities were reviewed</a:t>
+                      </a:r>
+                    </a:p>
+                  </a:txBody>
+                  <a:tcPr marL="109728" marR="109728" marT="54864" marB="54864" anchor="ctr">
+                    <a:lnL w="9525">
+                      <a:solidFill>
+                        <a:srgbClr val="E2E8F0"/>
+                      </a:solidFill>
+                    </a:lnL>
+                    <a:lnR w="9525">
+                      <a:solidFill>
+                        <a:srgbClr val="E2E8F0"/>
+                      </a:solidFill>
+                    </a:lnR>
+                    <a:lnT w="9525">
+                      <a:solidFill>
+                        <a:srgbClr val="E2E8F0"/>
+                      </a:solidFill>
+                    </a:lnT>
+                    <a:lnB w="9525">
+                      <a:solidFill>
+                        <a:srgbClr val="E2E8F0"/>
+                      </a:solidFill>
+                    </a:lnB>
+                    <a:solidFill>
+                      <a:srgbClr val="F1F5F9"/>
+                    </a:solidFill>
+                  </a:tcPr>
+                </a:tc>
+                <a:extLst>
+                  <a:ext uri="{0D108BD9-81ED-4DB2-BD59-A6C34878D82A}">
+                    <a16:rowId xmlns:a16="http://schemas.microsoft.com/office/drawing/2014/main" val="10001"/>
+                  </a:ext>
+                </a:extLst>
+              </a:tr>
+              <a:tr h="520000">
+                <a:tc>
+                  <a:txBody>
+                    <a:bodyPr/>
+                    <a:lstStyle/>
+                    <a:p>
+                      <a:pPr algn="l"/>
+                      <a:r>
+                        <a:rPr lang="en-US" sz="1000" b="1">
+                          <a:solidFill>
+                            <a:srgbClr val="0B1F3A"/>
+                          </a:solidFill>
+                          <a:latin typeface="Aptos"/>
+                        </a:rPr>
+                        <a:t>Specification</a:t>
+                      </a:r>
+                    </a:p>
+                  </a:txBody>
+                  <a:tcPr marL="109728" marR="109728" marT="54864" marB="54864" anchor="ctr">
+                    <a:lnL w="9525">
+                      <a:solidFill>
+                        <a:srgbClr val="E2E8F0"/>
+                      </a:solidFill>
+                    </a:lnL>
+                    <a:lnR w="9525">
+                      <a:solidFill>
+                        <a:srgbClr val="E2E8F0"/>
+                      </a:solidFill>
+                    </a:lnR>
+                    <a:lnT w="9525">
+                      <a:solidFill>
+                        <a:srgbClr val="E2E8F0"/>
+                      </a:solidFill>
+                    </a:lnT>
+                    <a:lnB w="9525">
+                      <a:solidFill>
+                        <a:srgbClr val="E2E8F0"/>
+                      </a:solidFill>
+                    </a:lnB>
+                    <a:solidFill>
+                      <a:srgbClr val="FFFFFF"/>
+                    </a:solidFill>
+                  </a:tcPr>
+                </a:tc>
+                <a:tc>
+                  <a:txBody>
+                    <a:bodyPr/>
+                    <a:lstStyle/>
+                    <a:p>
+                      <a:pPr algn="l"/>
+                      <a:r>
+                        <a:rPr lang="en-US" sz="1000" b="0">
+                          <a:solidFill>
+                            <a:srgbClr val="33404F"/>
+                          </a:solidFill>
+                          <a:latin typeface="Aptos"/>
+                        </a:rPr>
+                        <a:t>Drafted constitution, user stories, requirements, acceptance scenarios, and tasks</a:t>
+                      </a:r>
+                    </a:p>
+                  </a:txBody>
+                  <a:tcPr marL="109728" marR="109728" marT="54864" marB="54864" anchor="ctr">
+                    <a:lnL w="9525">
+                      <a:solidFill>
+                        <a:srgbClr val="E2E8F0"/>
+                      </a:solidFill>
+                    </a:lnL>
+                    <a:lnR w="9525">
+                      <a:solidFill>
+                        <a:srgbClr val="E2E8F0"/>
+                      </a:solidFill>
+                    </a:lnR>
+                    <a:lnT w="9525">
+                      <a:solidFill>
+                        <a:srgbClr val="E2E8F0"/>
+                      </a:solidFill>
+                    </a:lnT>
+                    <a:lnB w="9525">
+                      <a:solidFill>
+                        <a:srgbClr val="E2E8F0"/>
+                      </a:solidFill>
+                    </a:lnB>
+                    <a:solidFill>
+                      <a:srgbClr val="FFFFFF"/>
+                    </a:solidFill>
+                  </a:tcPr>
+                </a:tc>
+                <a:tc>
+                  <a:txBody>
+                    <a:bodyPr/>
+                    <a:lstStyle/>
+                    <a:p>
+                      <a:pPr algn="l"/>
+                      <a:r>
+                        <a:rPr lang="en-US" sz="1000" b="0">
+                          <a:solidFill>
+                            <a:srgbClr val="33404F"/>
+                          </a:solidFill>
+                          <a:latin typeface="Aptos"/>
+                        </a:rPr>
+                        <a:t>Specification was reviewed before implementation</a:t>
+                      </a:r>
+                    </a:p>
+                  </a:txBody>
+                  <a:tcPr marL="109728" marR="109728" marT="54864" marB="54864" anchor="ctr">
+                    <a:lnL w="9525">
+                      <a:solidFill>
+                        <a:srgbClr val="E2E8F0"/>
+                      </a:solidFill>
+                    </a:lnL>
+                    <a:lnR w="9525">
+                      <a:solidFill>
+                        <a:srgbClr val="E2E8F0"/>
+                      </a:solidFill>
+                    </a:lnR>
+                    <a:lnT w="9525">
+                      <a:solidFill>
+                        <a:srgbClr val="E2E8F0"/>
+                      </a:solidFill>
+                    </a:lnT>
+                    <a:lnB w="9525">
+                      <a:solidFill>
+                        <a:srgbClr val="E2E8F0"/>
+                      </a:solidFill>
+                    </a:lnB>
+                    <a:solidFill>
+                      <a:srgbClr val="FFFFFF"/>
+                    </a:solidFill>
+                  </a:tcPr>
+                </a:tc>
+                <a:extLst>
+                  <a:ext uri="{0D108BD9-81ED-4DB2-BD59-A6C34878D82A}">
+                    <a16:rowId xmlns:a16="http://schemas.microsoft.com/office/drawing/2014/main" val="10002"/>
+                  </a:ext>
+                </a:extLst>
+              </a:tr>
+              <a:tr h="520000">
+                <a:tc>
+                  <a:txBody>
+                    <a:bodyPr/>
+                    <a:lstStyle/>
+                    <a:p>
+                      <a:pPr algn="l"/>
+                      <a:r>
+                        <a:rPr lang="en-US" sz="1000" b="1">
+                          <a:solidFill>
+                            <a:srgbClr val="0B1F3A"/>
+                          </a:solidFill>
+                          <a:latin typeface="Aptos"/>
+                        </a:rPr>
+                        <a:t>Architecture</a:t>
+                      </a:r>
+                    </a:p>
+                  </a:txBody>
+                  <a:tcPr marL="109728" marR="109728" marT="54864" marB="54864" anchor="ctr">
+                    <a:lnL w="9525">
+                      <a:solidFill>
+                        <a:srgbClr val="E2E8F0"/>
+                      </a:solidFill>
+                    </a:lnL>
+                    <a:lnR w="9525">
+                      <a:solidFill>
+                        <a:srgbClr val="E2E8F0"/>
+                      </a:solidFill>
+                    </a:lnR>
+                    <a:lnT w="9525">
+                      <a:solidFill>
+                        <a:srgbClr val="E2E8F0"/>
+                      </a:solidFill>
+                    </a:lnT>
+                    <a:lnB w="9525">
+                      <a:solidFill>
+                        <a:srgbClr val="E2E8F0"/>
+                      </a:solidFill>
+                    </a:lnB>
+                    <a:solidFill>
+                      <a:srgbClr val="F1F5F9"/>
+                    </a:solidFill>
+                  </a:tcPr>
+                </a:tc>
+                <a:tc>
+                  <a:txBody>
+                    <a:bodyPr/>
+                    <a:lstStyle/>
+                    <a:p>
+                      <a:pPr algn="l"/>
+                      <a:r>
+                        <a:rPr lang="en-US" sz="1000" b="0">
+                          <a:solidFill>
+                            <a:srgbClr val="33404F"/>
+                          </a:solidFill>
+                          <a:latin typeface="Aptos"/>
+                        </a:rPr>
+                        <a:t>Compared single-agent and multi-agent designs and refined boundaries</a:t>
+                      </a:r>
+                    </a:p>
+                  </a:txBody>
+                  <a:tcPr marL="109728" marR="109728" marT="54864" marB="54864" anchor="ctr">
+                    <a:lnL w="9525">
+                      <a:solidFill>
+                        <a:srgbClr val="E2E8F0"/>
+                      </a:solidFill>
+                    </a:lnL>
+                    <a:lnR w="9525">
+                      <a:solidFill>
+                        <a:srgbClr val="E2E8F0"/>
+                      </a:solidFill>
+                    </a:lnR>
+                    <a:lnT w="9525">
+                      <a:solidFill>
+                        <a:srgbClr val="E2E8F0"/>
+                      </a:solidFill>
+                    </a:lnT>
+                    <a:lnB w="9525">
+                      <a:solidFill>
+                        <a:srgbClr val="E2E8F0"/>
+                      </a:solidFill>
+                    </a:lnB>
+                    <a:solidFill>
+                      <a:srgbClr val="F1F5F9"/>
+                    </a:solidFill>
+                  </a:tcPr>
+                </a:tc>
+                <a:tc>
+                  <a:txBody>
+                    <a:bodyPr/>
+                    <a:lstStyle/>
+                    <a:p>
+                      <a:pPr algn="l"/>
+                      <a:r>
+                        <a:rPr lang="en-US" sz="1000" b="0">
+                          <a:solidFill>
+                            <a:srgbClr val="33404F"/>
+                          </a:solidFill>
+                          <a:latin typeface="Aptos"/>
+                        </a:rPr>
+                        <a:t>Final architecture and trade-offs were selected manually</a:t>
+                      </a:r>
+                    </a:p>
+                  </a:txBody>
+                  <a:tcPr marL="109728" marR="109728" marT="54864" marB="54864" anchor="ctr">
+                    <a:lnL w="9525">
+                      <a:solidFill>
+                        <a:srgbClr val="E2E8F0"/>
+                      </a:solidFill>
+                    </a:lnL>
+                    <a:lnR w="9525">
+                      <a:solidFill>
+                        <a:srgbClr val="E2E8F0"/>
+                      </a:solidFill>
+                    </a:lnR>
+                    <a:lnT w="9525">
+                      <a:solidFill>
+                        <a:srgbClr val="E2E8F0"/>
+                      </a:solidFill>
+                    </a:lnT>
+                    <a:lnB w="9525">
+                      <a:solidFill>
+                        <a:srgbClr val="E2E8F0"/>
+                      </a:solidFill>
+                    </a:lnB>
+                    <a:solidFill>
+                      <a:srgbClr val="F1F5F9"/>
+                    </a:solidFill>
+                  </a:tcPr>
+                </a:tc>
+                <a:extLst>
+                  <a:ext uri="{0D108BD9-81ED-4DB2-BD59-A6C34878D82A}">
+                    <a16:rowId xmlns:a16="http://schemas.microsoft.com/office/drawing/2014/main" val="10003"/>
+                  </a:ext>
+                </a:extLst>
+              </a:tr>
+              <a:tr h="520000">
+                <a:tc>
+                  <a:txBody>
+                    <a:bodyPr/>
+                    <a:lstStyle/>
+                    <a:p>
+                      <a:pPr algn="l"/>
+                      <a:r>
+                        <a:rPr lang="en-US" sz="1000" b="1">
+                          <a:solidFill>
+                            <a:srgbClr val="0B1F3A"/>
+                          </a:solidFill>
+                          <a:latin typeface="Aptos"/>
+                        </a:rPr>
+                        <a:t>Prompt design</a:t>
+                      </a:r>
+                    </a:p>
+                  </a:txBody>
+                  <a:tcPr marL="109728" marR="109728" marT="54864" marB="54864" anchor="ctr">
+                    <a:lnL w="9525">
+                      <a:solidFill>
+                        <a:srgbClr val="E2E8F0"/>
+                      </a:solidFill>
+                    </a:lnL>
+                    <a:lnR w="9525">
+                      <a:solidFill>
+                        <a:srgbClr val="E2E8F0"/>
+                      </a:solidFill>
+                    </a:lnR>
+                    <a:lnT w="9525">
+                      <a:solidFill>
+                        <a:srgbClr val="E2E8F0"/>
+                      </a:solidFill>
+                    </a:lnT>
+                    <a:lnB w="9525">
+                      <a:solidFill>
+                        <a:srgbClr val="E2E8F0"/>
+                      </a:solidFill>
+                    </a:lnB>
+                    <a:solidFill>
+                      <a:srgbClr val="FFFFFF"/>
+                    </a:solidFill>
+                  </a:tcPr>
+                </a:tc>
+                <a:tc>
+                  <a:txBody>
+                    <a:bodyPr/>
+                    <a:lstStyle/>
+                    <a:p>
+                      <a:pPr algn="l"/>
+                      <a:r>
+                        <a:rPr lang="en-US" sz="1000" b="0">
+                          <a:solidFill>
+                            <a:srgbClr val="33404F"/>
+                          </a:solidFill>
+                          <a:latin typeface="Aptos"/>
+                        </a:rPr>
+                        <a:t>Drafted roles, grounding rules, decision examples, and output contracts</a:t>
+                      </a:r>
+                    </a:p>
+                  </a:txBody>
+                  <a:tcPr marL="109728" marR="109728" marT="54864" marB="54864" anchor="ctr">
+                    <a:lnL w="9525">
+                      <a:solidFill>
+                        <a:srgbClr val="E2E8F0"/>
+                      </a:solidFill>
+                    </a:lnL>
+                    <a:lnR w="9525">
+                      <a:solidFill>
+                        <a:srgbClr val="E2E8F0"/>
+                      </a:solidFill>
+                    </a:lnR>
+                    <a:lnT w="9525">
+                      <a:solidFill>
+                        <a:srgbClr val="E2E8F0"/>
+                      </a:solidFill>
+                    </a:lnT>
+                    <a:lnB w="9525">
+                      <a:solidFill>
+                        <a:srgbClr val="E2E8F0"/>
+                      </a:solidFill>
+                    </a:lnB>
+                    <a:solidFill>
+                      <a:srgbClr val="FFFFFF"/>
+                    </a:solidFill>
+                  </a:tcPr>
+                </a:tc>
+                <a:tc>
+                  <a:txBody>
+                    <a:bodyPr/>
+                    <a:lstStyle/>
+                    <a:p>
+                      <a:pPr algn="l"/>
+                      <a:r>
+                        <a:rPr lang="en-US" sz="1000" b="0">
+                          <a:solidFill>
+                            <a:srgbClr val="33404F"/>
+                          </a:solidFill>
+                          <a:latin typeface="Aptos"/>
+                        </a:rPr>
+                        <a:t>Prompts were reviewed and schema constrained</a:t>
+                      </a:r>
+                    </a:p>
+                  </a:txBody>
+                  <a:tcPr marL="109728" marR="109728" marT="54864" marB="54864" anchor="ctr">
+                    <a:lnL w="9525">
+                      <a:solidFill>
+                        <a:srgbClr val="E2E8F0"/>
+                      </a:solidFill>
+                    </a:lnL>
+                    <a:lnR w="9525">
+                      <a:solidFill>
+                        <a:srgbClr val="E2E8F0"/>
+                      </a:solidFill>
+                    </a:lnR>
+                    <a:lnT w="9525">
+                      <a:solidFill>
+                        <a:srgbClr val="E2E8F0"/>
+                      </a:solidFill>
+                    </a:lnT>
+                    <a:lnB w="9525">
+                      <a:solidFill>
+                        <a:srgbClr val="E2E8F0"/>
+                      </a:solidFill>
+                    </a:lnB>
+                    <a:solidFill>
+                      <a:srgbClr val="FFFFFF"/>
+                    </a:solidFill>
+                  </a:tcPr>
+                </a:tc>
+                <a:extLst>
+                  <a:ext uri="{0D108BD9-81ED-4DB2-BD59-A6C34878D82A}">
+                    <a16:rowId xmlns:a16="http://schemas.microsoft.com/office/drawing/2014/main" val="10004"/>
+                  </a:ext>
+                </a:extLst>
+              </a:tr>
+              <a:tr h="520000">
+                <a:tc>
+                  <a:txBody>
+                    <a:bodyPr/>
+                    <a:lstStyle/>
+                    <a:p>
+                      <a:pPr algn="l"/>
+                      <a:r>
+                        <a:rPr lang="en-US" sz="1000" b="1">
+                          <a:solidFill>
+                            <a:srgbClr val="0B1F3A"/>
+                          </a:solidFill>
+                          <a:latin typeface="Aptos"/>
+                        </a:rPr>
+                        <a:t>Coding</a:t>
+                      </a:r>
+                    </a:p>
+                  </a:txBody>
+                  <a:tcPr marL="109728" marR="109728" marT="54864" marB="54864" anchor="ctr">
+                    <a:lnL w="9525">
+                      <a:solidFill>
+                        <a:srgbClr val="E2E8F0"/>
+                      </a:solidFill>
+                    </a:lnL>
+                    <a:lnR w="9525">
+                      <a:solidFill>
+                        <a:srgbClr val="E2E8F0"/>
+                      </a:solidFill>
+                    </a:lnR>
+                    <a:lnT w="9525">
+                      <a:solidFill>
+                        <a:srgbClr val="E2E8F0"/>
+                      </a:solidFill>
+                    </a:lnT>
+                    <a:lnB w="9525">
+                      <a:solidFill>
+                        <a:srgbClr val="E2E8F0"/>
+                      </a:solidFill>
+                    </a:lnB>
+                    <a:solidFill>
+                      <a:srgbClr val="F1F5F9"/>
+                    </a:solidFill>
+                  </a:tcPr>
+                </a:tc>
+                <a:tc>
+                  <a:txBody>
+                    <a:bodyPr/>
+                    <a:lstStyle/>
+                    <a:p>
+                      <a:pPr algn="l"/>
+                      <a:r>
+                        <a:rPr lang="en-US" sz="1000" b="0">
+                          <a:solidFill>
+                            <a:srgbClr val="33404F"/>
+                          </a:solidFill>
+                          <a:latin typeface="Aptos"/>
+                        </a:rPr>
+                        <a:t>Assisted with framework APIs, models, tools, workflow, and documentation</a:t>
+                      </a:r>
+                    </a:p>
+                  </a:txBody>
+                  <a:tcPr marL="109728" marR="109728" marT="54864" marB="54864" anchor="ctr">
+                    <a:lnL w="9525">
+                      <a:solidFill>
+                        <a:srgbClr val="E2E8F0"/>
+                      </a:solidFill>
+                    </a:lnL>
+                    <a:lnR w="9525">
+                      <a:solidFill>
+                        <a:srgbClr val="E2E8F0"/>
+                      </a:solidFill>
+                    </a:lnR>
+                    <a:lnT w="9525">
+                      <a:solidFill>
+                        <a:srgbClr val="E2E8F0"/>
+                      </a:solidFill>
+                    </a:lnT>
+                    <a:lnB w="9525">
+                      <a:solidFill>
+                        <a:srgbClr val="E2E8F0"/>
+                      </a:solidFill>
+                    </a:lnB>
+                    <a:solidFill>
+                      <a:srgbClr val="F1F5F9"/>
+                    </a:solidFill>
+                  </a:tcPr>
+                </a:tc>
+                <a:tc>
+                  <a:txBody>
+                    <a:bodyPr/>
+                    <a:lstStyle/>
+                    <a:p>
+                      <a:pPr algn="l"/>
+                      <a:r>
+                        <a:rPr lang="en-US" sz="1000" b="0">
+                          <a:solidFill>
+                            <a:srgbClr val="33404F"/>
+                          </a:solidFill>
+                          <a:latin typeface="Aptos"/>
+                        </a:rPr>
+                        <a:t>Code was manually reviewed and tested</a:t>
+                      </a:r>
+                    </a:p>
+                  </a:txBody>
+                  <a:tcPr marL="109728" marR="109728" marT="54864" marB="54864" anchor="ctr">
+                    <a:lnL w="9525">
+                      <a:solidFill>
+                        <a:srgbClr val="E2E8F0"/>
+                      </a:solidFill>
+                    </a:lnL>
+                    <a:lnR w="9525">
+                      <a:solidFill>
+                        <a:srgbClr val="E2E8F0"/>
+                      </a:solidFill>
+                    </a:lnR>
+                    <a:lnT w="9525">
+                      <a:solidFill>
+                        <a:srgbClr val="E2E8F0"/>
+                      </a:solidFill>
+                    </a:lnT>
+                    <a:lnB w="9525">
+                      <a:solidFill>
+                        <a:srgbClr val="E2E8F0"/>
+                      </a:solidFill>
+                    </a:lnB>
+                    <a:solidFill>
+                      <a:srgbClr val="F1F5F9"/>
+                    </a:solidFill>
+                  </a:tcPr>
+                </a:tc>
+                <a:extLst>
+                  <a:ext uri="{0D108BD9-81ED-4DB2-BD59-A6C34878D82A}">
+                    <a16:rowId xmlns:a16="http://schemas.microsoft.com/office/drawing/2014/main" val="10005"/>
+                  </a:ext>
+                </a:extLst>
+              </a:tr>
+              <a:tr h="520000">
+                <a:tc>
+                  <a:txBody>
+                    <a:bodyPr/>
+                    <a:lstStyle/>
+                    <a:p>
+                      <a:pPr algn="l"/>
+                      <a:r>
+                        <a:rPr lang="en-US" sz="1000" b="1">
+                          <a:solidFill>
+                            <a:srgbClr val="0B1F3A"/>
+                          </a:solidFill>
+                          <a:latin typeface="Aptos"/>
+                        </a:rPr>
+                        <a:t>Testing</a:t>
+                      </a:r>
+                    </a:p>
+                  </a:txBody>
+                  <a:tcPr marL="109728" marR="109728" marT="54864" marB="54864" anchor="ctr">
+                    <a:lnL w="9525">
+                      <a:solidFill>
+                        <a:srgbClr val="E2E8F0"/>
+                      </a:solidFill>
+                    </a:lnL>
+                    <a:lnR w="9525">
+                      <a:solidFill>
+                        <a:srgbClr val="E2E8F0"/>
+                      </a:solidFill>
+                    </a:lnR>
+                    <a:lnT w="9525">
+                      <a:solidFill>
+                        <a:srgbClr val="E2E8F0"/>
+                      </a:solidFill>
+                    </a:lnT>
+                    <a:lnB w="9525">
+                      <a:solidFill>
+                        <a:srgbClr val="E2E8F0"/>
+                      </a:solidFill>
+                    </a:lnB>
+                    <a:solidFill>
+                      <a:srgbClr val="FFFFFF"/>
+                    </a:solidFill>
+                  </a:tcPr>
+                </a:tc>
+                <a:tc>
+                  <a:txBody>
+                    <a:bodyPr/>
+                    <a:lstStyle/>
+                    <a:p>
+                      <a:pPr algn="l"/>
+                      <a:r>
+                        <a:rPr lang="en-US" sz="1000" b="0">
+                          <a:solidFill>
+                            <a:srgbClr val="33404F"/>
+                          </a:solidFill>
+                          <a:latin typeface="Aptos"/>
+                        </a:rPr>
+                        <a:t>Generated initial tests, negative guardrail cases, and evaluation criteria</a:t>
+                      </a:r>
+                    </a:p>
+                  </a:txBody>
+                  <a:tcPr marL="109728" marR="109728" marT="54864" marB="54864" anchor="ctr">
+                    <a:lnL w="9525">
+                      <a:solidFill>
+                        <a:srgbClr val="E2E8F0"/>
+                      </a:solidFill>
+                    </a:lnL>
+                    <a:lnR w="9525">
+                      <a:solidFill>
+                        <a:srgbClr val="E2E8F0"/>
+                      </a:solidFill>
+                    </a:lnR>
+                    <a:lnT w="9525">
+                      <a:solidFill>
+                        <a:srgbClr val="E2E8F0"/>
+                      </a:solidFill>
+                    </a:lnT>
+                    <a:lnB w="9525">
+                      <a:solidFill>
+                        <a:srgbClr val="E2E8F0"/>
+                      </a:solidFill>
+                    </a:lnB>
+                    <a:solidFill>
+                      <a:srgbClr val="FFFFFF"/>
+                    </a:solidFill>
+                  </a:tcPr>
+                </a:tc>
+                <a:tc>
+                  <a:txBody>
+                    <a:bodyPr/>
+                    <a:lstStyle/>
+                    <a:p>
+                      <a:pPr algn="l"/>
+                      <a:r>
+                        <a:rPr lang="en-US" sz="1000" b="0">
+                          <a:solidFill>
+                            <a:srgbClr val="33404F"/>
+                          </a:solidFill>
+                          <a:latin typeface="Aptos"/>
+                        </a:rPr>
+                        <a:t>Deterministic assertions decide pass/fail</a:t>
+                      </a:r>
+                    </a:p>
+                  </a:txBody>
+                  <a:tcPr marL="109728" marR="109728" marT="54864" marB="54864" anchor="ctr">
+                    <a:lnL w="9525">
+                      <a:solidFill>
+                        <a:srgbClr val="E2E8F0"/>
+                      </a:solidFill>
+                    </a:lnL>
+                    <a:lnR w="9525">
+                      <a:solidFill>
+                        <a:srgbClr val="E2E8F0"/>
+                      </a:solidFill>
+                    </a:lnR>
+                    <a:lnT w="9525">
+                      <a:solidFill>
+                        <a:srgbClr val="E2E8F0"/>
+                      </a:solidFill>
+                    </a:lnT>
+                    <a:lnB w="9525">
+                      <a:solidFill>
+                        <a:srgbClr val="E2E8F0"/>
+                      </a:solidFill>
+                    </a:lnB>
+                    <a:solidFill>
+                      <a:srgbClr val="FFFFFF"/>
+                    </a:solidFill>
+                  </a:tcPr>
+                </a:tc>
+                <a:extLst>
+                  <a:ext uri="{0D108BD9-81ED-4DB2-BD59-A6C34878D82A}">
+                    <a16:rowId xmlns:a16="http://schemas.microsoft.com/office/drawing/2014/main" val="10006"/>
+                  </a:ext>
+                </a:extLst>
+              </a:tr>
+              <a:tr h="520000">
+                <a:tc>
+                  <a:txBody>
+                    <a:bodyPr/>
+                    <a:lstStyle/>
+                    <a:p>
+                      <a:pPr algn="l"/>
+                      <a:r>
+                        <a:rPr lang="en-US" sz="1000" b="1">
+                          <a:solidFill>
+                            <a:srgbClr val="0B1F3A"/>
+                          </a:solidFill>
+                          <a:latin typeface="Aptos"/>
+                        </a:rPr>
+                        <a:t>Evaluation</a:t>
+                      </a:r>
+                    </a:p>
+                  </a:txBody>
+                  <a:tcPr marL="109728" marR="109728" marT="54864" marB="54864" anchor="ctr">
+                    <a:lnL w="9525">
+                      <a:solidFill>
+                        <a:srgbClr val="E2E8F0"/>
+                      </a:solidFill>
+                    </a:lnL>
+                    <a:lnR w="9525">
+                      <a:solidFill>
+                        <a:srgbClr val="E2E8F0"/>
+                      </a:solidFill>
+                    </a:lnR>
+                    <a:lnT w="9525">
+                      <a:solidFill>
+                        <a:srgbClr val="E2E8F0"/>
+                      </a:solidFill>
+                    </a:lnT>
+                    <a:lnB w="9525">
+                      <a:solidFill>
+                        <a:srgbClr val="E2E8F0"/>
+                      </a:solidFill>
+                    </a:lnB>
+                    <a:solidFill>
+                      <a:srgbClr val="F1F5F9"/>
+                    </a:solidFill>
+                  </a:tcPr>
+                </a:tc>
+                <a:tc>
+                  <a:txBody>
+                    <a:bodyPr/>
+                    <a:lstStyle/>
+                    <a:p>
+                      <a:pPr algn="l"/>
+                      <a:r>
+                        <a:rPr lang="en-US" sz="1000" b="0">
+                          <a:solidFill>
+                            <a:srgbClr val="33404F"/>
+                          </a:solidFill>
+                          <a:latin typeface="Aptos"/>
+                        </a:rPr>
+                        <a:t>Helped define six representative scenarios and quality criteria</a:t>
+                      </a:r>
+                    </a:p>
+                  </a:txBody>
+                  <a:tcPr marL="109728" marR="109728" marT="54864" marB="54864" anchor="ctr">
+                    <a:lnL w="9525">
+                      <a:solidFill>
+                        <a:srgbClr val="E2E8F0"/>
+                      </a:solidFill>
+                    </a:lnL>
+                    <a:lnR w="9525">
+                      <a:solidFill>
+                        <a:srgbClr val="E2E8F0"/>
+                      </a:solidFill>
+                    </a:lnR>
+                    <a:lnT w="9525">
+                      <a:solidFill>
+                        <a:srgbClr val="E2E8F0"/>
+                      </a:solidFill>
+                    </a:lnT>
+                    <a:lnB w="9525">
+                      <a:solidFill>
+                        <a:srgbClr val="E2E8F0"/>
+                      </a:solidFill>
+                    </a:lnB>
+                    <a:solidFill>
+                      <a:srgbClr val="F1F5F9"/>
+                    </a:solidFill>
+                  </a:tcPr>
+                </a:tc>
+                <a:tc>
+                  <a:txBody>
+                    <a:bodyPr/>
+                    <a:lstStyle/>
+                    <a:p>
+                      <a:pPr algn="l"/>
+                      <a:r>
+                        <a:rPr lang="en-US" sz="1000" b="0">
+                          <a:solidFill>
+                            <a:srgbClr val="33404F"/>
+                          </a:solidFill>
+                          <a:latin typeface="Aptos"/>
+                        </a:rPr>
+                        <a:t>Results were compared with source and reviewer expectations</a:t>
+                      </a:r>
+                    </a:p>
+                  </a:txBody>
+                  <a:tcPr marL="109728" marR="109728" marT="54864" marB="54864" anchor="ctr">
+                    <a:lnL w="9525">
+                      <a:solidFill>
+                        <a:srgbClr val="E2E8F0"/>
+                      </a:solidFill>
+                    </a:lnL>
+                    <a:lnR w="9525">
+                      <a:solidFill>
+                        <a:srgbClr val="E2E8F0"/>
+                      </a:solidFill>
+                    </a:lnR>
+                    <a:lnT w="9525">
+                      <a:solidFill>
+                        <a:srgbClr val="E2E8F0"/>
+                      </a:solidFill>
+                    </a:lnT>
+                    <a:lnB w="9525">
+                      <a:solidFill>
+                        <a:srgbClr val="E2E8F0"/>
+                      </a:solidFill>
+                    </a:lnB>
+                    <a:solidFill>
+                      <a:srgbClr val="F1F5F9"/>
+                    </a:solidFill>
+                  </a:tcPr>
+                </a:tc>
+                <a:extLst>
+                  <a:ext uri="{0D108BD9-81ED-4DB2-BD59-A6C34878D82A}">
+                    <a16:rowId xmlns:a16="http://schemas.microsoft.com/office/drawing/2014/main" val="10007"/>
+                  </a:ext>
+                </a:extLst>
+              </a:tr>
+              <a:tr h="520000">
+                <a:tc>
+                  <a:txBody>
+                    <a:bodyPr/>
+                    <a:lstStyle/>
+                    <a:p>
+                      <a:pPr algn="l"/>
+                      <a:r>
+                        <a:rPr lang="en-US" sz="1000" b="1">
+                          <a:solidFill>
+                            <a:srgbClr val="0B1F3A"/>
+                          </a:solidFill>
+                          <a:latin typeface="Aptos"/>
+                        </a:rPr>
+                        <a:t>DevOps</a:t>
+                      </a:r>
+                    </a:p>
+                  </a:txBody>
+                  <a:tcPr marL="109728" marR="109728" marT="54864" marB="54864" anchor="ctr">
+                    <a:lnL w="9525">
+                      <a:solidFill>
+                        <a:srgbClr val="E2E8F0"/>
+                      </a:solidFill>
+                    </a:lnL>
+                    <a:lnR w="9525">
+                      <a:solidFill>
+                        <a:srgbClr val="E2E8F0"/>
+                      </a:solidFill>
+                    </a:lnR>
+                    <a:lnT w="9525">
+                      <a:solidFill>
+                        <a:srgbClr val="E2E8F0"/>
+                      </a:solidFill>
+                    </a:lnT>
+                    <a:lnB w="9525">
+                      <a:solidFill>
+                        <a:srgbClr val="E2E8F0"/>
+                      </a:solidFill>
+                    </a:lnB>
+                    <a:solidFill>
+                      <a:srgbClr val="FFFFFF"/>
+                    </a:solidFill>
+                  </a:tcPr>
+                </a:tc>
+                <a:tc>
+                  <a:txBody>
+                    <a:bodyPr/>
+                    <a:lstStyle/>
+                    <a:p>
+                      <a:pPr algn="l"/>
+                      <a:r>
+                        <a:rPr lang="en-US" sz="1000" b="0">
+                          <a:solidFill>
+                            <a:srgbClr val="33404F"/>
+                          </a:solidFill>
+                          <a:latin typeface="Aptos"/>
+                        </a:rPr>
+                        <a:t>Helped define repeatable commands and CI/CD quality gates</a:t>
+                      </a:r>
+                    </a:p>
+                  </a:txBody>
+                  <a:tcPr marL="109728" marR="109728" marT="54864" marB="54864" anchor="ctr">
+                    <a:lnL w="9525">
+                      <a:solidFill>
+                        <a:srgbClr val="E2E8F0"/>
+                      </a:solidFill>
+                    </a:lnL>
+                    <a:lnR w="9525">
+                      <a:solidFill>
+                        <a:srgbClr val="E2E8F0"/>
+                      </a:solidFill>
+                    </a:lnR>
+                    <a:lnT w="9525">
+                      <a:solidFill>
+                        <a:srgbClr val="E2E8F0"/>
+                      </a:solidFill>
+                    </a:lnT>
+                    <a:lnB w="9525">
+                      <a:solidFill>
+                        <a:srgbClr val="E2E8F0"/>
+                      </a:solidFill>
+                    </a:lnB>
+                    <a:solidFill>
+                      <a:srgbClr val="FFFFFF"/>
+                    </a:solidFill>
+                  </a:tcPr>
+                </a:tc>
+                <a:tc>
+                  <a:txBody>
+                    <a:bodyPr/>
+                    <a:lstStyle/>
+                    <a:p>
+                      <a:pPr algn="l"/>
+                      <a:r>
+                        <a:rPr lang="en-US" sz="1000" b="0">
+                          <a:solidFill>
+                            <a:srgbClr val="33404F"/>
+                          </a:solidFill>
+                          <a:latin typeface="Aptos"/>
+                        </a:rPr>
+                        <a:t>Secrets, artifacts, approvals, and deployment remain controlled</a:t>
+                      </a:r>
+                    </a:p>
+                  </a:txBody>
+                  <a:tcPr marL="109728" marR="109728" marT="54864" marB="54864" anchor="ctr">
+                    <a:lnL w="9525">
+                      <a:solidFill>
+                        <a:srgbClr val="E2E8F0"/>
+                      </a:solidFill>
+                    </a:lnL>
+                    <a:lnR w="9525">
+                      <a:solidFill>
+                        <a:srgbClr val="E2E8F0"/>
+                      </a:solidFill>
+                    </a:lnR>
+                    <a:lnT w="9525">
+                      <a:solidFill>
+                        <a:srgbClr val="E2E8F0"/>
+                      </a:solidFill>
+                    </a:lnT>
+                    <a:lnB w="9525">
+                      <a:solidFill>
+                        <a:srgbClr val="E2E8F0"/>
+                      </a:solidFill>
+                    </a:lnB>
+                    <a:solidFill>
+                      <a:srgbClr val="FFFFFF"/>
+                    </a:solidFill>
+                  </a:tcPr>
+                </a:tc>
+                <a:extLst>
+                  <a:ext uri="{0D108BD9-81ED-4DB2-BD59-A6C34878D82A}">
+                    <a16:rowId xmlns:a16="http://schemas.microsoft.com/office/drawing/2014/main" val="10008"/>
+                  </a:ext>
+                </a:extLst>
+              </a:tr>
+              <a:tr h="520000">
+                <a:tc>
+                  <a:txBody>
+                    <a:bodyPr/>
+                    <a:lstStyle/>
+                    <a:p>
+                      <a:pPr algn="l"/>
+                      <a:r>
+                        <a:rPr lang="en-US" sz="1000" b="1">
+                          <a:solidFill>
+                            <a:srgbClr val="0B1F3A"/>
+                          </a:solidFill>
+                          <a:latin typeface="Aptos"/>
+                        </a:rPr>
+                        <a:t>Operations</a:t>
+                      </a:r>
+                    </a:p>
+                  </a:txBody>
+                  <a:tcPr marL="109728" marR="109728" marT="54864" marB="54864" anchor="ctr">
+                    <a:lnL w="9525">
+                      <a:solidFill>
+                        <a:srgbClr val="E2E8F0"/>
+                      </a:solidFill>
+                    </a:lnL>
+                    <a:lnR w="9525">
+                      <a:solidFill>
+                        <a:srgbClr val="E2E8F0"/>
+                      </a:solidFill>
+                    </a:lnR>
+                    <a:lnT w="9525">
+                      <a:solidFill>
+                        <a:srgbClr val="E2E8F0"/>
+                      </a:solidFill>
+                    </a:lnT>
+                    <a:lnB w="9525">
+                      <a:solidFill>
+                        <a:srgbClr val="E2E8F0"/>
+                      </a:solidFill>
+                    </a:lnB>
+                    <a:solidFill>
+                      <a:srgbClr val="F1F5F9"/>
+                    </a:solidFill>
+                  </a:tcPr>
+                </a:tc>
+                <a:tc>
+                  <a:txBody>
+                    <a:bodyPr/>
+                    <a:lstStyle/>
+                    <a:p>
+                      <a:pPr algn="l"/>
+                      <a:r>
+                        <a:rPr lang="en-US" sz="1000" b="0" dirty="0">
+                          <a:solidFill>
+                            <a:srgbClr val="33404F"/>
+                          </a:solidFill>
+                          <a:latin typeface="Aptos"/>
+                        </a:rPr>
+                        <a:t>Helped define logs, correlation, fallback, and monitoring signals</a:t>
+                      </a:r>
+                    </a:p>
+                  </a:txBody>
+                  <a:tcPr marL="109728" marR="109728" marT="54864" marB="54864" anchor="ctr">
+                    <a:lnL w="9525">
+                      <a:solidFill>
+                        <a:srgbClr val="E2E8F0"/>
+                      </a:solidFill>
+                    </a:lnL>
+                    <a:lnR w="9525">
+                      <a:solidFill>
+                        <a:srgbClr val="E2E8F0"/>
+                      </a:solidFill>
+                    </a:lnR>
+                    <a:lnT w="9525">
+                      <a:solidFill>
+                        <a:srgbClr val="E2E8F0"/>
+                      </a:solidFill>
+                    </a:lnT>
+                    <a:lnB w="9525">
+                      <a:solidFill>
+                        <a:srgbClr val="E2E8F0"/>
+                      </a:solidFill>
+                    </a:lnB>
+                    <a:solidFill>
+                      <a:srgbClr val="F1F5F9"/>
+                    </a:solidFill>
+                  </a:tcPr>
+                </a:tc>
+                <a:tc>
+                  <a:txBody>
+                    <a:bodyPr/>
+                    <a:lstStyle/>
+                    <a:p>
+                      <a:pPr algn="l"/>
+                      <a:r>
+                        <a:rPr lang="en-US" sz="1000" b="0" dirty="0">
+                          <a:solidFill>
+                            <a:srgbClr val="33404F"/>
+                          </a:solidFill>
+                          <a:latin typeface="Aptos"/>
+                        </a:rPr>
+                        <a:t>Logs exclude sensitive content and unexpected errors surface</a:t>
+                      </a:r>
+                    </a:p>
+                  </a:txBody>
+                  <a:tcPr marL="109728" marR="109728" marT="54864" marB="54864" anchor="ctr">
+                    <a:lnL w="9525">
+                      <a:solidFill>
+                        <a:srgbClr val="E2E8F0"/>
+                      </a:solidFill>
+                    </a:lnL>
+                    <a:lnR w="9525">
+                      <a:solidFill>
+                        <a:srgbClr val="E2E8F0"/>
+                      </a:solidFill>
+                    </a:lnR>
+                    <a:lnT w="9525">
+                      <a:solidFill>
+                        <a:srgbClr val="E2E8F0"/>
+                      </a:solidFill>
+                    </a:lnT>
+                    <a:lnB w="9525">
+                      <a:solidFill>
+                        <a:srgbClr val="E2E8F0"/>
+                      </a:solidFill>
+                    </a:lnB>
+                    <a:solidFill>
+                      <a:srgbClr val="F1F5F9"/>
+                    </a:solidFill>
+                  </a:tcPr>
+                </a:tc>
+                <a:extLst>
+                  <a:ext uri="{0D108BD9-81ED-4DB2-BD59-A6C34878D82A}">
+                    <a16:rowId xmlns:a16="http://schemas.microsoft.com/office/drawing/2014/main" val="10009"/>
+                  </a:ext>
+                </a:extLst>
+              </a:tr>
+            </a:tbl>
+          </a:graphicData>
+        </a:graphic>
+      </p:graphicFrame>
+      <p:sp>
+        <p:nvSpPr>
+          <p:cNvPr id="7" name="TextBox 6"/>
+          <p:cNvSpPr txBox="1"/>
+          <p:nvPr/>
+        </p:nvSpPr>
+        <p:spPr>
+          <a:xfrm>
+            <a:off x="502920" y="6565392"/>
+            <a:ext cx="7498079" cy="164592"/>
+          </a:xfrm>
+          <a:prstGeom prst="rect">
+            <a:avLst/>
+          </a:prstGeom>
+          <a:noFill/>
+        </p:spPr>
+        <p:txBody>
+          <a:bodyPr wrap="square" lIns="0" tIns="0" rIns="0" bIns="0" anchor="ctr">
+            <a:spAutoFit/>
+          </a:bodyPr>
+          <a:lstStyle/>
+          <a:p>
+            <a:pPr algn="l"/>
+            <a:r>
+              <a:rPr sz="800" b="0">
+                <a:solidFill>
+                  <a:srgbClr val="5B6675"/>
+                </a:solidFill>
+                <a:latin typeface="Aptos"/>
+              </a:rPr>
+              <a:t>Smart Backlog Assistant | AI-native SDLC case study</a:t>
+            </a:r>
+          </a:p>
+        </p:txBody>
+      </p:sp>
+      <p:sp>
+        <p:nvSpPr>
+          <p:cNvPr id="8" name="TextBox 7"/>
+          <p:cNvSpPr txBox="1"/>
+          <p:nvPr/>
+        </p:nvSpPr>
+        <p:spPr>
+          <a:xfrm>
+            <a:off x="9692640" y="6565392"/>
+            <a:ext cx="2011680" cy="164592"/>
+          </a:xfrm>
+          <a:prstGeom prst="rect">
+            <a:avLst/>
+          </a:prstGeom>
+          <a:noFill/>
+        </p:spPr>
+        <p:txBody>
+          <a:bodyPr wrap="square" lIns="0" tIns="0" rIns="0" bIns="0" anchor="ctr">
+            <a:spAutoFit/>
+          </a:bodyPr>
+          <a:lstStyle/>
+          <a:p>
+            <a:pPr algn="r"/>
+            <a:r>
+              <a:rPr sz="800" b="0">
+                <a:solidFill>
+                  <a:srgbClr val="2563EB"/>
+                </a:solidFill>
+                <a:latin typeface="Aptos"/>
+              </a:rPr>
+              <a:t>github.com/sjnoolkar-accenture</a:t>
+            </a:r>
+          </a:p>
+        </p:txBody>
+      </p:sp>
+    </p:spTree>
+  </p:cSld>
+  <p:clrMapOvr>
+    <a:masterClrMapping/>
+  </p:clrMapOvr>
+</p:sld>
+</file>
+
+<file path=ppt/slides/slide8.xml><?xml version="1.0" encoding="utf-8"?>
 <p:sld xmlns:a="http://schemas.openxmlformats.org/drawingml/2006/main" xmlns:r="http://schemas.openxmlformats.org/officeDocument/2006/relationships" xmlns:p="http://schemas.openxmlformats.org/presentationml/2006/main">
   <p:cSld>
     <p:bg>
